--- a/docs/presentation.pptx
+++ b/docs/presentation.pptx
@@ -5,7 +5,7 @@
     <p:sldMasterId id="2147483673" r:id="rId1"/>
   </p:sldMasterIdLst>
   <p:notesMasterIdLst>
-    <p:notesMasterId r:id="rId9"/>
+    <p:notesMasterId r:id="rId10"/>
   </p:notesMasterIdLst>
   <p:sldIdLst>
     <p:sldId id="256" r:id="rId2"/>
@@ -15,6 +15,7 @@
     <p:sldId id="260" r:id="rId6"/>
     <p:sldId id="261" r:id="rId7"/>
     <p:sldId id="262" r:id="rId8"/>
+    <p:sldId id="263" r:id="rId9"/>
   </p:sldIdLst>
   <p:sldSz cx="12192000" cy="6858000"/>
   <p:notesSz cx="6858000" cy="9144000"/>
@@ -119,7 +120,7 @@
 <file path=ppt/revisionInfo.xml><?xml version="1.0" encoding="utf-8"?>
 <p1510:revInfo xmlns:a="http://schemas.openxmlformats.org/drawingml/2006/main" xmlns:r="http://schemas.openxmlformats.org/officeDocument/2006/relationships" xmlns:p1510="http://schemas.microsoft.com/office/powerpoint/2015/10/main">
   <p1510:revLst>
-    <p1510:client id="{514E6332-4641-4E93-882D-5465B5485E51}" v="3" dt="2026-03-20T23:21:38.889"/>
+    <p1510:client id="{514E6332-4641-4E93-882D-5465B5485E51}" v="9" dt="2026-03-20T23:48:18.921"/>
   </p1510:revLst>
 </p1510:revInfo>
 </file>
@@ -129,7 +130,7 @@
   <pc:docChgLst>
     <pc:chgData name="Thomas Onions" userId="23e2c68c8a230f3d" providerId="LiveId" clId="{7DDE5D2B-9E3B-47E8-8399-2C57B922F6DF}"/>
     <pc:docChg chg="undo custSel addSld modSld">
-      <pc:chgData name="Thomas Onions" userId="23e2c68c8a230f3d" providerId="LiveId" clId="{7DDE5D2B-9E3B-47E8-8399-2C57B922F6DF}" dt="2026-03-20T23:22:23.157" v="1478" actId="1076"/>
+      <pc:chgData name="Thomas Onions" userId="23e2c68c8a230f3d" providerId="LiveId" clId="{7DDE5D2B-9E3B-47E8-8399-2C57B922F6DF}" dt="2026-03-20T23:48:23.555" v="1531" actId="5793"/>
       <pc:docMkLst>
         <pc:docMk/>
       </pc:docMkLst>
@@ -304,6 +305,29 @@
             <ac:picMk id="5" creationId="{97DE8307-FEC8-1D88-9820-26D4F7412552}"/>
           </ac:picMkLst>
         </pc:picChg>
+      </pc:sldChg>
+      <pc:sldChg chg="modSp new mod">
+        <pc:chgData name="Thomas Onions" userId="23e2c68c8a230f3d" providerId="LiveId" clId="{7DDE5D2B-9E3B-47E8-8399-2C57B922F6DF}" dt="2026-03-20T23:48:23.555" v="1531" actId="5793"/>
+        <pc:sldMkLst>
+          <pc:docMk/>
+          <pc:sldMk cId="1627682714" sldId="263"/>
+        </pc:sldMkLst>
+        <pc:spChg chg="mod">
+          <ac:chgData name="Thomas Onions" userId="23e2c68c8a230f3d" providerId="LiveId" clId="{7DDE5D2B-9E3B-47E8-8399-2C57B922F6DF}" dt="2026-03-20T23:47:23.162" v="1495" actId="20577"/>
+          <ac:spMkLst>
+            <pc:docMk/>
+            <pc:sldMk cId="1627682714" sldId="263"/>
+            <ac:spMk id="2" creationId="{A68D6A99-FE8A-3616-B20B-0E12A3929AA6}"/>
+          </ac:spMkLst>
+        </pc:spChg>
+        <pc:spChg chg="mod">
+          <ac:chgData name="Thomas Onions" userId="23e2c68c8a230f3d" providerId="LiveId" clId="{7DDE5D2B-9E3B-47E8-8399-2C57B922F6DF}" dt="2026-03-20T23:48:23.555" v="1531" actId="5793"/>
+          <ac:spMkLst>
+            <pc:docMk/>
+            <pc:sldMk cId="1627682714" sldId="263"/>
+            <ac:spMk id="3" creationId="{3E3BBD16-1106-DCA6-C842-56CE54BC78BF}"/>
+          </ac:spMkLst>
+        </pc:spChg>
       </pc:sldChg>
     </pc:docChg>
   </pc:docChgLst>
@@ -4741,10 +4765,10 @@
         <a:lstStyle/>
         <a:p>
           <a:r>
-            <a:rPr lang="en-GB"/>
+            <a:rPr lang="en-GB" dirty="0"/>
             <a:t>CRUD Operations fully functional, with additional options for filtering, sorting and analysis</a:t>
           </a:r>
-          <a:endParaRPr lang="en-US"/>
+          <a:endParaRPr lang="en-US" dirty="0"/>
         </a:p>
       </dgm:t>
     </dgm:pt>
@@ -6923,10 +6947,10 @@
             <a:buNone/>
           </a:pPr>
           <a:r>
-            <a:rPr lang="en-GB" sz="2100" kern="1200"/>
+            <a:rPr lang="en-GB" sz="2100" kern="1200" dirty="0"/>
             <a:t>CRUD Operations fully functional, with additional options for filtering, sorting and analysis</a:t>
           </a:r>
-          <a:endParaRPr lang="en-US" sz="2100" kern="1200"/>
+          <a:endParaRPr lang="en-US" sz="2100" kern="1200" dirty="0"/>
         </a:p>
       </dsp:txBody>
       <dsp:txXfrm>
@@ -18338,6 +18362,131 @@
 </p:sld>
 </file>
 
+<file path=ppt/slides/slide8.xml><?xml version="1.0" encoding="utf-8"?>
+<p:sld xmlns:a="http://schemas.openxmlformats.org/drawingml/2006/main" xmlns:r="http://schemas.openxmlformats.org/officeDocument/2006/relationships" xmlns:p="http://schemas.openxmlformats.org/presentationml/2006/main">
+  <p:cSld>
+    <p:spTree>
+      <p:nvGrpSpPr>
+        <p:cNvPr id="1" name=""/>
+        <p:cNvGrpSpPr/>
+        <p:nvPr/>
+      </p:nvGrpSpPr>
+      <p:grpSpPr>
+        <a:xfrm>
+          <a:off x="0" y="0"/>
+          <a:ext cx="0" cy="0"/>
+          <a:chOff x="0" y="0"/>
+          <a:chExt cx="0" cy="0"/>
+        </a:xfrm>
+      </p:grpSpPr>
+      <p:sp>
+        <p:nvSpPr>
+          <p:cNvPr id="2" name="Title 1">
+            <a:extLst>
+              <a:ext uri="{FF2B5EF4-FFF2-40B4-BE49-F238E27FC236}">
+                <a16:creationId xmlns:a16="http://schemas.microsoft.com/office/drawing/2014/main" id="{A68D6A99-FE8A-3616-B20B-0E12A3929AA6}"/>
+              </a:ext>
+            </a:extLst>
+          </p:cNvPr>
+          <p:cNvSpPr>
+            <a:spLocks noGrp="1"/>
+          </p:cNvSpPr>
+          <p:nvPr>
+            <p:ph type="title"/>
+          </p:nvPr>
+        </p:nvSpPr>
+        <p:spPr/>
+        <p:txBody>
+          <a:bodyPr/>
+          <a:lstStyle/>
+          <a:p>
+            <a:r>
+              <a:rPr lang="en-GB" dirty="0"/>
+              <a:t>All Deliverables</a:t>
+            </a:r>
+          </a:p>
+        </p:txBody>
+      </p:sp>
+      <p:sp>
+        <p:nvSpPr>
+          <p:cNvPr id="3" name="Content Placeholder 2">
+            <a:extLst>
+              <a:ext uri="{FF2B5EF4-FFF2-40B4-BE49-F238E27FC236}">
+                <a16:creationId xmlns:a16="http://schemas.microsoft.com/office/drawing/2014/main" id="{3E3BBD16-1106-DCA6-C842-56CE54BC78BF}"/>
+              </a:ext>
+            </a:extLst>
+          </p:cNvPr>
+          <p:cNvSpPr>
+            <a:spLocks noGrp="1"/>
+          </p:cNvSpPr>
+          <p:nvPr>
+            <p:ph idx="1"/>
+          </p:nvPr>
+        </p:nvSpPr>
+        <p:spPr/>
+        <p:txBody>
+          <a:bodyPr/>
+          <a:lstStyle/>
+          <a:p>
+            <a:r>
+              <a:rPr lang="en-GB" dirty="0"/>
+              <a:t>GitHub: </a:t>
+            </a:r>
+            <a:r>
+              <a:rPr lang="en-GB" dirty="0">
+                <a:hlinkClick r:id="rId2"/>
+              </a:rPr>
+              <a:t>https://github.com/TomO256/webservcw</a:t>
+            </a:r>
+            <a:endParaRPr lang="en-GB" dirty="0"/>
+          </a:p>
+          <a:p>
+            <a:r>
+              <a:rPr lang="en-GB" dirty="0"/>
+              <a:t>API Docs: </a:t>
+            </a:r>
+            <a:r>
+              <a:rPr lang="en-GB" dirty="0">
+                <a:hlinkClick r:id="rId3"/>
+              </a:rPr>
+              <a:t>https://github.com/TomO256/webservcw/blob/main/docs/API%20Docs.pdf</a:t>
+            </a:r>
+            <a:endParaRPr lang="en-GB" dirty="0"/>
+          </a:p>
+          <a:p>
+            <a:r>
+              <a:rPr lang="en-GB" dirty="0"/>
+              <a:t>Report: </a:t>
+            </a:r>
+            <a:r>
+              <a:rPr lang="en-GB" dirty="0">
+                <a:hlinkClick r:id="rId4"/>
+              </a:rPr>
+              <a:t>https://github.com/TomO256/webservcw/blob/main/docs/report.pdf</a:t>
+            </a:r>
+            <a:endParaRPr lang="en-GB" dirty="0"/>
+          </a:p>
+          <a:p>
+            <a:pPr marL="0" indent="0">
+              <a:buNone/>
+            </a:pPr>
+            <a:endParaRPr lang="en-GB" dirty="0"/>
+          </a:p>
+        </p:txBody>
+      </p:sp>
+    </p:spTree>
+    <p:extLst>
+      <p:ext uri="{BB962C8B-B14F-4D97-AF65-F5344CB8AC3E}">
+        <p14:creationId xmlns:p14="http://schemas.microsoft.com/office/powerpoint/2010/main" val="1627682714"/>
+      </p:ext>
+    </p:extLst>
+  </p:cSld>
+  <p:clrMapOvr>
+    <a:masterClrMapping/>
+  </p:clrMapOvr>
+</p:sld>
+</file>
+
 <file path=ppt/theme/theme1.xml><?xml version="1.0" encoding="utf-8"?>
 <a:theme xmlns:a="http://schemas.openxmlformats.org/drawingml/2006/main" name="DashVTI">
   <a:themeElements>
